--- a/buildathon-deck.pptx
+++ b/buildathon-deck.pptx
@@ -7250,7 +7250,7 @@
                 </a:solidFill>
                 <a:latin typeface="Helvetica Neue"/>
               </a:rPr>
-              <a:t>Les équipes choisissent un challenge parmi les 39 opportunités APP du registre, réparties sur 7 thèmes : Wallets (6) · Infra (4) · Lending (5) · RWA &amp; Stables (5) · EVM DeFi (6) · Dev Tooling (4) · AI Agents (9). Bracket des prix mappé sur les 3 tiers du registre :</a:t>
+              <a:t>Les OPP du registre sont des opportunités identifiées — des idées sur lesquelles nous pensons qu'il existe un potentiel besoin (signaux convergents PWG + ATKA + écosystème + YC + interviews founders). Elles ne sont en aucun cas un cadre restrictif. Tous les projets XRPL sont permis et bienvenus — qu'ils correspondent à une OPP, qu'ils en combinent plusieurs, ou qu'ils proposent quelque chose de complètement différent. Le registre est un point de départ pour aider les builders qui cherchent l'inspiration, pas une checklist obligatoire.</a:t>
             </a:r>
           </a:p>
         </p:txBody>
@@ -7263,7 +7263,7 @@
         </p:nvSpPr>
         <p:spPr>
           <a:xfrm>
-            <a:off x="502920" y="4145280"/>
+            <a:off x="502920" y="4343400"/>
             <a:ext cx="11185855" cy="2286000"/>
           </a:xfrm>
           <a:prstGeom prst="rect">

--- a/buildathon-deck.pptx
+++ b/buildathon-deck.pptx
@@ -4096,7 +4096,7 @@
                 </a:solidFill>
                 <a:latin typeface="Helvetica Neue"/>
               </a:rPr>
-              <a:t>2 slots fixes/semaine · 30 min chacun + 1 jour IRL/semaine à la Commons House</a:t>
+              <a:t>Cadence hebdo "ship + visibility" + 2 slots fixes + 1 jour IRL à la Commons House</a:t>
             </a:r>
           </a:p>
         </p:txBody>
@@ -4164,7 +4164,7 @@
                 </a:solidFill>
                 <a:latin typeface="Helvetica Neue"/>
               </a:rPr>
-              <a:t>Pourquoi 2 slots fixes + 1 jour IRL : crée un battement de cœur pour la cohorte (online + offline), rend le scheduling des mentors gérable, permet aux équipes de planifier leur semaine. Le jour à la Commons House casse l'isolement du full-online et crée des liens cross-équipes. Le Discord async couvre tout le reste.</a:t>
+              <a:t>🚢 Weekly Ship Cadence (Guillaume)</a:t>
             </a:r>
           </a:p>
         </p:txBody>
@@ -4177,7 +4177,7 @@
         </p:nvSpPr>
         <p:spPr>
           <a:xfrm>
-            <a:off x="502920" y="4303776"/>
+            <a:off x="502920" y="3438144"/>
             <a:ext cx="11185855" cy="2286000"/>
           </a:xfrm>
           <a:prstGeom prst="rect">
@@ -4203,7 +4203,7 @@
                 </a:solidFill>
                 <a:latin typeface="Helvetica Neue"/>
               </a:rPr>
-              <a:t>• 🏠 Build at the Commons House — 1 jour par semaine, venez développer votre projet dans nos locaux. Coworking IRL ouvert aux équipes parisiennes (ou de passage), accès aux mentors XRPL Commons en présentiel, déjeuner …</a:t>
+              <a:t>• Chaque équipe livre toutes les semaines : (1) video courte (60-120s) du progrès · (2) deck slide unique · (3) feedback users sur les socials (post X avec wallet connecté + XRP profile pour traçabilité)</a:t>
             </a:r>
           </a:p>
           <a:p>
@@ -4219,7 +4219,7 @@
                 </a:solidFill>
                 <a:latin typeface="Helvetica Neue"/>
               </a:rPr>
-              <a:t>• Mardi 11h–11h30 CET — Tech Office Hour (XRPL devrel + Ripple infra). Topics : specs XLS-66 / XLS-65 / XLS-70, code review, debug d'intégration. Live group call (Zoom), enregistré.</a:t>
+              <a:t>• XRPL Commons amplifie : push hebdo du top 5 ou 10 sur ses canaux + lien public unique permettant de voir toutes les soumissions</a:t>
             </a:r>
           </a:p>
           <a:p>
@@ -4235,39 +4235,7 @@
                 </a:solidFill>
                 <a:latin typeface="Helvetica Neue"/>
               </a:rPr>
-              <a:t>• Jeudi 16h–16h30 CET — Product / GTM Office Hour (XRPL Commons + alumni Aquarium). Topics : positionnement, pitch shaping, distribution strategy, intégrations RLUSD/CEX. Live group call, enregistré.</a:t>
-            </a:r>
-          </a:p>
-          <a:p>
-            <a:pPr>
-              <a:spcAft>
-                <a:spcPts val="400"/>
-              </a:spcAft>
-            </a:pPr>
-            <a:r>
-              <a:rPr sz="1200">
-                <a:solidFill>
-                  <a:srgbClr val="0E1116"/>
-                </a:solidFill>
-                <a:latin typeface="Helvetica Neue"/>
-              </a:rPr>
-              <a:t>• AMA on-demand — async via canal Discord dédié. Réponse ≤24h depuis un pool de mentors rotatif d'environ 10 personnes.</a:t>
-            </a:r>
-          </a:p>
-          <a:p>
-            <a:pPr>
-              <a:spcAft>
-                <a:spcPts val="400"/>
-              </a:spcAft>
-            </a:pPr>
-            <a:r>
-              <a:rPr sz="1200">
-                <a:solidFill>
-                  <a:srgbClr val="0E1116"/>
-                </a:solidFill>
-                <a:latin typeface="Helvetica Neue"/>
-              </a:rPr>
-              <a:t>• 1:1 office hours réservables via Calendly partagé (max 30min/semaine par équipe) — pour stratégie produit, IP/légal, prépa fundraising.</a:t>
+              <a:t>• Merch reward pour les meilleurs commentaires / feedback reçus par chaque équipe (vérif que le feedback est qualifié : wallet connecté, XRP profile actif, pas de bot)</a:t>
             </a:r>
           </a:p>
         </p:txBody>
@@ -5024,7 +4992,7 @@
                 </a:solidFill>
                 <a:latin typeface="Helvetica Neue"/>
               </a:rPr>
-              <a:t>Variante 1 · Hybrid · flagship annuel + waves continues</a:t>
+              <a:t>Variante 1 · Buildathon 30x · Hybrid milestone-grants + parcours XRPL Commons</a:t>
             </a:r>
           </a:p>
         </p:txBody>
@@ -5058,7 +5026,7 @@
                 </a:solidFill>
                 <a:latin typeface="Helvetica Neue"/>
               </a:rPr>
-              <a:t>Combine modèle Colosseum (B) + Akindo (C) — le plus complet, le plus ambitieux</a:t>
+              <a:t>Format simple, pool $100k annuel, milestone-based, intégré dans le parcours Académie → Aquarium → Startup Studio</a:t>
             </a:r>
           </a:p>
         </p:txBody>
@@ -5131,7 +5099,7 @@
                 </a:solidFill>
                 <a:latin typeface="Helvetica Neue"/>
               </a:rPr>
-              <a:t>• Buildathon flagship annuel · 30 jours online · selection curated 30-50 équipes · finale IRL à Apex · prize pool $300-500k cash + investissement pre-seed top 5 ($50k × 5 = $250k)</a:t>
+              <a:t>• Buildathon 30 jours online · open (pas de selection curated) · cible quelques centaines → ~1000 users sur mainnet par projet · gate live-traction obligatoire (mainnet deployed + activité on-chain mesurable par Sourc…</a:t>
             </a:r>
           </a:p>
           <a:p>
@@ -5147,7 +5115,7 @@
                 </a:solidFill>
                 <a:latin typeface="Helvetica Neue"/>
               </a:rPr>
-              <a:t>• Waves continues (2-3 par an, entre flagships) · 14 jours chacune · pool $50-100k par wave distribué on-chain (RLUSD) à 20-30 projets · milestone-based · pas de jury formel, vote communauté</a:t>
+              <a:t>• Pool $100k · structure hybride (cf. Section 05) : 5 grands prix × $10k milestone-based ($3k upfront + $3k M1 + $4k M2) = $50k</a:t>
             </a:r>
           </a:p>
           <a:p>
@@ -5163,7 +5131,23 @@
                 </a:solidFill>
                 <a:latin typeface="Helvetica Neue"/>
               </a:rPr>
-              <a:t>• Accelerator post-flagship · 8 semaines pour top 5 du flagship · mentorship XRPL Commons + Ripple Ventures · objectif PMF + premier tour seed</a:t>
+              <a:t>• Jusqu'à 100 petits prix × 500€ = $50k</a:t>
+            </a:r>
+          </a:p>
+          <a:p>
+            <a:pPr>
+              <a:spcAft>
+                <a:spcPts val="400"/>
+              </a:spcAft>
+            </a:pPr>
+            <a:r>
+              <a:rPr sz="1200">
+                <a:solidFill>
+                  <a:srgbClr val="0E1116"/>
+                </a:solidFill>
+                <a:latin typeface="Helvetica Neue"/>
+              </a:rPr>
+              <a:t>• Aquarium access (perk) pour le 1er grand prix</a:t>
             </a:r>
           </a:p>
         </p:txBody>
@@ -5906,7 +5890,7 @@
                 </a:solidFill>
                 <a:latin typeface="Helvetica Neue"/>
               </a:rPr>
-              <a:t>Building zone</a:t>
+              <a:t>Buildathon 30x</a:t>
             </a:r>
           </a:p>
         </p:txBody>
@@ -5940,7 +5924,7 @@
                 </a:solidFill>
                 <a:latin typeface="Helvetica Neue"/>
               </a:rPr>
-              <a:t>Tagline : « Where institutional DeFi gets built »</a:t>
+              <a:t>Tagline : « 30 days · to the power of x » — la mécanique est encodée dans le nom : 30 jours × récompenses puissance x (la suite reste ouverte).</a:t>
             </a:r>
           </a:p>
         </p:txBody>
@@ -5974,7 +5958,7 @@
                 </a:solidFill>
                 <a:latin typeface="Helvetica Neue"/>
               </a:rPr>
-              <a:t>Court, action-oriented, évoque un atelier où ça construit. Continuité avec l'asset de marque "XRPL Zone" des 4 PWG Paris (avril 2026) sans y être trop attaché — fonctionne comme un nom d'événement standalone.</a:t>
+              <a:t>Le nom encode la durée du programme (30 jours) et signale que le pool de récompenses peut évoluer (x = à puissance variable). Marketing gold : aucune autre marque crypto buildathon n'utilise ce pattern (Solana=Colosseum, Arbitrum=Open House, Akindo=WaveHack, ETHGlobal=ville-based) — place de marché libre. Vote final sur la communication restera à arbitrer par l'équipe marketing.</a:t>
             </a:r>
           </a:p>
         </p:txBody>
@@ -5987,7 +5971,7 @@
         </p:nvSpPr>
         <p:spPr>
           <a:xfrm>
-            <a:off x="502920" y="3971544"/>
+            <a:off x="502920" y="4343400"/>
             <a:ext cx="11185855" cy="2286000"/>
           </a:xfrm>
           <a:prstGeom prst="rect">
@@ -6013,7 +5997,7 @@
                 </a:solidFill>
                 <a:latin typeface="Helvetica Neue"/>
               </a:rPr>
-              <a:t>• Pour : punchy, verbe d'action, suffisamment neutre pour scaler au-delà d'un seul événement, faible coût marketing</a:t>
+              <a:t>• Pour : punchy, mémorable, scalable (l'an prochain on peut faire 30² ou 30³ sans changer de marque) ; encode directement la durée (Section 02) et signale un programme avec potentiel d'amplification</a:t>
             </a:r>
           </a:p>
           <a:p>
@@ -6029,7 +6013,7 @@
                 </a:solidFill>
                 <a:latin typeface="Helvetica Neue"/>
               </a:rPr>
-              <a:t>• Contre : ne dit pas "XRPL" — nécessite un sous-titre pour contexte (ex : « Building zone · XRPL »)</a:t>
+              <a:t>• Contre : ne dit pas "XRPL" — nécessite un sous-titre type "Buildathon 30x · XRPL Commons" pour le contexte ; léger risque SEO ("30^x" peut être lu de plusieurs façons)</a:t>
             </a:r>
           </a:p>
         </p:txBody>
@@ -7289,7 +7273,7 @@
                 </a:solidFill>
                 <a:latin typeface="Helvetica Neue"/>
               </a:rPr>
-              <a:t>• Tier HIGH (×6 challenges APP) → Bracket Grand Prix. Les opps user-facing à plus fort impact : OPP-018 · B2B Stablecoin FX desk / corridor (infra)</a:t>
+              <a:t>• Tier HIGH (×7 challenges APP) → Bracket Grand Prix. Les opps user-facing à plus fort impact : OPP-017 · B2B Stablecoin FX desk / corridor (b2b)</a:t>
             </a:r>
           </a:p>
           <a:p>
@@ -7305,7 +7289,7 @@
                 </a:solidFill>
                 <a:latin typeface="Helvetica Neue"/>
               </a:rPr>
-              <a:t>• OPP-021 · Lending Protocol on EVM Sidechain (Morpho-style) (lending)</a:t>
+              <a:t>• OPP-030 · Lending Protocol on EVM Sidechain (Morpho-style) (defi)</a:t>
             </a:r>
           </a:p>
           <a:p>
@@ -7321,7 +7305,7 @@
                 </a:solidFill>
                 <a:latin typeface="Helvetica Neue"/>
               </a:rPr>
-              <a:t>• OPP-025 · Lending front-end on Single Asset Vault (pre-XLS-66) (lending)</a:t>
+              <a:t>• OPP-034 · Lending front-end on Single Asset Vault (pre-XLS-66) (defi)</a:t>
             </a:r>
           </a:p>
           <a:p>
@@ -7337,7 +7321,7 @@
                 </a:solidFill>
                 <a:latin typeface="Helvetica Neue"/>
               </a:rPr>
-              <a:t>• OPP-031 · Compliance-native consumer payments (Wise-on-XRPL) (rwa-stable)</a:t>
+              <a:t>• OPP-025 · Compliance-native consumer payments (Wise-on-XRPL) (rwat)</a:t>
             </a:r>
           </a:p>
           <a:p>
@@ -7353,7 +7337,7 @@
                 </a:solidFill>
                 <a:latin typeface="Helvetica Neue"/>
               </a:rPr>
-              <a:t>• OPP-033 · Restaking Protocol for XRP (Babylon-fork) (evm-defi)</a:t>
+              <a:t>• OPP-036 · Restaking Protocol for XRP (Babylon-fork) (defi)</a:t>
             </a:r>
           </a:p>
         </p:txBody>
@@ -7663,7 +7647,7 @@
                 </a:solidFill>
                 <a:latin typeface="Helvetica Neue"/>
               </a:rPr>
-              <a:t>Pool 30k USD · volume-gated en XRP</a:t>
+              <a:t>Pool $100k · Hybrid milestone-grants + petits prix + Aquarium</a:t>
             </a:r>
           </a:p>
         </p:txBody>
@@ -7697,7 +7681,7 @@
                 </a:solidFill>
                 <a:latin typeface="Helvetica Neue"/>
               </a:rPr>
-              <a:t>Prize pool total 30 000 USD (distribué en XRP) + perks (fast-track Aquarium, intro Ripple Investments, mentoring)</a:t>
+              <a:t>Budget annuel 2026 dédié — $100k structurés en 3 brackets : $50k en grands milestone-grants ($10k × 5) + $50k en petits prix (500€ × jusqu'à 100 projets) + Aquarium access pour le 1er.</a:t>
             </a:r>
           </a:p>
         </p:txBody>
@@ -7731,7 +7715,7 @@
                 </a:solidFill>
                 <a:latin typeface="Helvetica Neue"/>
               </a:rPr>
-              <a:t>Inspiré du modèle "RFS + live traction" (interview Florence) — filtre les démos polies, récompense ceux qui comprennent la distribution.</a:t>
+              <a:t>Filtre les démos polies, récompense la traction réelle (mainnet + users + volume). Inspiré du modèle "RFS + live traction" (interview Florence).</a:t>
             </a:r>
           </a:p>
         </p:txBody>
@@ -7744,7 +7728,7 @@
         </p:nvSpPr>
         <p:spPr>
           <a:xfrm>
-            <a:off x="502920" y="3752088"/>
+            <a:off x="502920" y="3776472"/>
             <a:ext cx="11185855" cy="2286000"/>
           </a:xfrm>
           <a:prstGeom prst="rect">
@@ -7786,7 +7770,7 @@
                 </a:solidFill>
                 <a:latin typeface="Helvetica Neue"/>
               </a:rPr>
-              <a:t>• Activité on-chain mesurable au jour 30 : volume · transactions · adresses uniques</a:t>
+              <a:t>• Activité on-chain mesurable via SourceTag au jour 30 : volume · transactions · adresses uniques</a:t>
             </a:r>
           </a:p>
         </p:txBody>

--- a/buildathon-deck.pptx
+++ b/buildathon-deck.pptx
@@ -8513,7 +8513,7 @@
                 </a:solidFill>
                 <a:latin typeface="Helvetica Neue"/>
               </a:rPr>
-              <a:t>4 critères — simples &amp; pondérés</a:t>
+              <a:t>2-step judging — Gate binaire puis scoring par bracket de prix</a:t>
             </a:r>
           </a:p>
         </p:txBody>
@@ -8547,7 +8547,7 @@
                 </a:solidFill>
                 <a:latin typeface="Helvetica Neue"/>
               </a:rPr>
-              <a:t>Total = 100%, publié aux candidats dès le départ</a:t>
+              <a:t>Les critères s'appliquent différemment selon le bracket (petits prix vs grands milestone-grants). Tout est publié aux candidats dès le départ.</a:t>
             </a:r>
           </a:p>
         </p:txBody>
@@ -8581,7 +8581,7 @@
                 </a:solidFill>
                 <a:latin typeface="Helvetica Neue"/>
               </a:rPr>
-              <a:t>Simple à communiquer, facile à optimiser pour une équipe, pas d'overlap. Traction est le nouveau levier (remplace « Distribution thinking » + « Gap fit » combinés) : dans un format 30 jours full online, des signups réels et un usage démontré sont le signal le plus fiable.</a:t>
+              <a:t>Critères tout-ou-rien au Day 30. Sans ces 2 conditions, aucun prix n'est attribué (cf. Section 05) :</a:t>
             </a:r>
           </a:p>
         </p:txBody>
@@ -8589,6 +8589,61 @@
       <p:sp>
         <p:nvSpPr>
           <p:cNvPr id="10" name="TextBox 9"/>
+          <p:cNvSpPr txBox="1"/>
+          <p:nvPr/>
+        </p:nvSpPr>
+        <p:spPr>
+          <a:xfrm>
+            <a:off x="502920" y="3642360"/>
+            <a:ext cx="11185855" cy="2286000"/>
+          </a:xfrm>
+          <a:prstGeom prst="rect">
+            <a:avLst/>
+          </a:prstGeom>
+          <a:noFill/>
+        </p:spPr>
+        <p:txBody>
+          <a:bodyPr wrap="square">
+            <a:spAutoFit/>
+          </a:bodyPr>
+          <a:lstStyle/>
+          <a:p>
+            <a:pPr>
+              <a:spcAft>
+                <a:spcPts val="400"/>
+              </a:spcAft>
+            </a:pPr>
+            <a:r>
+              <a:rPr sz="1200">
+                <a:solidFill>
+                  <a:srgbClr val="0E1116"/>
+                </a:solidFill>
+                <a:latin typeface="Helvetica Neue"/>
+              </a:rPr>
+              <a:t>• Mainnet deployment — projet déployé et accessible sur XRPL mainnet, code source publié (ou justifié si propriétaire)</a:t>
+            </a:r>
+          </a:p>
+          <a:p>
+            <a:pPr>
+              <a:spcAft>
+                <a:spcPts val="400"/>
+              </a:spcAft>
+            </a:pPr>
+            <a:r>
+              <a:rPr sz="1200">
+                <a:solidFill>
+                  <a:srgbClr val="0E1116"/>
+                </a:solidFill>
+                <a:latin typeface="Helvetica Neue"/>
+              </a:rPr>
+              <a:t>• Activité on-chain mesurable via SourceTag — au moins 1 transaction réelle attribuable au projet via SourceTag, validable par le jury sur explorer XRPL</a:t>
+            </a:r>
+          </a:p>
+        </p:txBody>
+      </p:sp>
+      <p:sp>
+        <p:nvSpPr>
+          <p:cNvPr id="11" name="TextBox 10"/>
           <p:cNvSpPr txBox="1"/>
           <p:nvPr/>
         </p:nvSpPr>
@@ -8623,7 +8678,7 @@
       </p:sp>
       <p:sp>
         <p:nvSpPr>
-          <p:cNvPr id="11" name="TextBox 10"/>
+          <p:cNvPr id="12" name="TextBox 11"/>
           <p:cNvSpPr txBox="1"/>
           <p:nvPr/>
         </p:nvSpPr>

--- a/buildathon-deck.pptx
+++ b/buildathon-deck.pptx
@@ -3665,7 +3665,7 @@
                 </a:solidFill>
                 <a:latin typeface="Helvetica Neue"/>
               </a:rPr>
-              <a:t>Solo ou équipe — pas de min, pas de max</a:t>
+              <a:t>Solo ou équipe — pas de minimum, pas de maximum, aucun profil requis</a:t>
             </a:r>
           </a:p>
         </p:txBody>
@@ -3699,7 +3699,7 @@
                 </a:solidFill>
                 <a:latin typeface="Helvetica Neue"/>
               </a:rPr>
-              <a:t>Accessibilité max — n'importe qui peut postuler, seul ou avec cofondateurs</a:t>
+              <a:t>Accessibilité max — n'importe qui peut postuler, seul ou avec n'importe quels cofondateurs. Aucun pré-requis de profil.</a:t>
             </a:r>
           </a:p>
         </p:txBody>
@@ -3738,7 +3738,7 @@
                 </a:solidFill>
                 <a:latin typeface="Helvetica Neue"/>
               </a:rPr>
-              <a:t>• Pas de minimum — les solo applicants sont bienvenus et éligibles à tous les tiers de prix</a:t>
+              <a:t>• Pas de minimum — les solo applicants sont bienvenus et éligibles à tous les tiers de prix (petits prix + grands milestone-grants + Aquarium access)</a:t>
             </a:r>
           </a:p>
           <a:p>
@@ -3754,7 +3754,7 @@
                 </a:solidFill>
                 <a:latin typeface="Helvetica Neue"/>
               </a:rPr>
-              <a:t>• Pas de maximum — les équipes de toute taille peuvent postuler (mais le jury pondère la clarté de la contribution individuelle dans le scoring)</a:t>
+              <a:t>• Pas de maximum — les équipes de toute taille peuvent postuler</a:t>
             </a:r>
           </a:p>
           <a:p>
@@ -3770,7 +3770,7 @@
                 </a:solidFill>
                 <a:latin typeface="Helvetica Neue"/>
               </a:rPr>
-              <a:t>• Diversité géographique encouragée — format full online = n'importe qui, n'importe où peut concourir</a:t>
+              <a:t>• Aucun profil requis — pas de minimum expérience XRPL, pas de minimum expérience crypto, pas de seniority required. Si vous savez build, vous êtes éligible.</a:t>
             </a:r>
           </a:p>
           <a:p>
@@ -3786,7 +3786,23 @@
                 </a:solidFill>
                 <a:latin typeface="Helvetica Neue"/>
               </a:rPr>
-              <a:t>• Alumni Aquarium / Hackathon sont éligibles au prix dédié "From the community" (500 €)</a:t>
+              <a:t>• Diversité géographique encouragée — format full online + 1 jour IRL/semaine optionnel à la Commons House (Paris) = n'importe qui, n'importe où peut concourir</a:t>
+            </a:r>
+          </a:p>
+          <a:p>
+            <a:pPr>
+              <a:spcAft>
+                <a:spcPts val="400"/>
+              </a:spcAft>
+            </a:pPr>
+            <a:r>
+              <a:rPr sz="1200">
+                <a:solidFill>
+                  <a:srgbClr val="0E1116"/>
+                </a:solidFill>
+                <a:latin typeface="Helvetica Neue"/>
+              </a:rPr>
+              <a:t>• Alumni Aquarium / Hackathon sont éligibles à l'ensemble des prix sans distinction (le côté "From the community" était une ancienne reco, supprimée)</a:t>
             </a:r>
           </a:p>
         </p:txBody>
@@ -6446,7 +6462,7 @@
                 </a:solidFill>
                 <a:latin typeface="Helvetica Neue"/>
               </a:rPr>
-              <a:t>• Day 1 → Day 28 : Phase de build — 2 office hours/semaine (30min chacune)</a:t>
+              <a:t>• Day 1 → Day 28 : Phase de build — 2 office hours/semaine (30min chacune) + Build at the Commons House 1 jour/semaine (cf. Section 09)</a:t>
             </a:r>
           </a:p>
           <a:p>
@@ -7166,7 +7182,7 @@
                 </a:solidFill>
                 <a:latin typeface="Helvetica Neue"/>
               </a:rPr>
-              <a:t>Registre /opportunities — 39 opportunités APP, 7 thèmes</a:t>
+              <a:t>Registre /opportunities — 41 opportunités APP, 5 thèmes</a:t>
             </a:r>
           </a:p>
         </p:txBody>
@@ -7200,7 +7216,7 @@
                 </a:solidFill>
                 <a:latin typeface="Helvetica Neue"/>
               </a:rPr>
-              <a:t>Le challenge register du Buildathon = le sous-ensemble APP du registre unifié /opportunities (single source of truth · convergence PWG + ATKA + ECO + YC + interviews). Les 24 opps de type TOOL (librairies, primitives, SDKs) sont hors-scope du Buildathon — destinées à des équipes existantes / contributeurs core.</a:t>
+              <a:t>Le challenge register du Buildathon = le sous-ensemble APP du registre unifié /opportunities (single source of truth · convergence PWG + ATKA + ECO + YC + interviews). Les 26 opps de type TOOL (librairies, primitives, SDKs) sont hors-scope du Buildathon — destinées à des équipes existantes / contributeurs core.</a:t>
             </a:r>
           </a:p>
         </p:txBody>
@@ -8080,7 +8096,7 @@
                 </a:solidFill>
                 <a:latin typeface="Helvetica Neue"/>
               </a:rPr>
-              <a:t>XRPL Commons (seul)</a:t>
+              <a:t>XRPL Commons team · composition à finaliser</a:t>
             </a:r>
           </a:p>
         </p:txBody>
@@ -8114,7 +8130,7 @@
                 </a:solidFill>
                 <a:latin typeface="Helvetica Neue"/>
               </a:rPr>
-              <a:t>Jury mono-organisation — ownership clair, décisions rapides</a:t>
+              <a:t>Jury mono-organisation — ownership clair, décisions rapides. Noms à finaliser en interne.</a:t>
             </a:r>
           </a:p>
         </p:txBody>
@@ -8148,7 +8164,7 @@
                 </a:solidFill>
                 <a:latin typeface="Helvetica Neue"/>
               </a:rPr>
-              <a:t>XRPL Commons gère le jury seul. Connaît les builders, connaît la roadmap Atlas, owns la qualité du programme. Pas d'overhead de coordination, pas de cauchemar de scheduling, accountability claire si un résultat est contesté.</a:t>
+              <a:t>L'équipe XRPL Commons gère le jury seule. Connaît les builders, owns la roadmap, la qualité du programme et l'évaluation des critères Section 07. Pas d'overhead de coordination, pas de cauchemar de scheduling, accountability claire si un résultat est contesté. La composition exacte (jurés titulaires + suppléants) sera décidée en interne, sans annonce publique des noms.</a:t>
             </a:r>
           </a:p>
         </p:txBody>
@@ -8161,7 +8177,7 @@
         </p:nvSpPr>
         <p:spPr>
           <a:xfrm>
-            <a:off x="502920" y="4020312"/>
+            <a:off x="502920" y="4343400"/>
             <a:ext cx="11185855" cy="2286000"/>
           </a:xfrm>
           <a:prstGeom prst="rect">
@@ -8203,7 +8219,7 @@
                 </a:solidFill>
                 <a:latin typeface="Helvetica Neue"/>
               </a:rPr>
-              <a:t>• Contre : pas d'équilibrage advocacy/accountability externe — risque d'être perçu comme trop interne</a:t>
+              <a:t>• Contre : pas d'équilibrage advocacy/accountability externe — risque d'être perçu comme trop interne (compensé par la transparence des critères Section 07 et la validation publique des milestones M1/M2)</a:t>
             </a:r>
           </a:p>
         </p:txBody>
